--- a/발표/20260805_밭보다_본선발표_v8.pptx
+++ b/발표/20260805_밭보다_본선발표_v8.pptx
@@ -3126,9 +3126,7 @@
           <a:bodyPr wrap="square" lIns="0" tIns="0" rIns="0" bIns="0" rtlCol="0" anchor="ctr"/>
           <a:lstStyle/>
           <a:p>
-            <a:pPr marL="0" indent="0" algn="ctr">
-              <a:buNone/>
-            </a:pPr>
+            <a:pPr algn="ctr"/>
             <a:r>
               <a:rPr lang="en-US" sz="3400" b="1" dirty="0">
                 <a:solidFill>
@@ -3138,7 +3136,7 @@
                 <a:ea typeface="맑은 고딕" pitchFamily="34" charset="-122"/>
                 <a:cs typeface="맑은 고딕" pitchFamily="34" charset="-120"/>
               </a:rPr>
-              <a:t>batboda.vercel.app</a:t>
+              <a:t>https://batboda.vercel.app</a:t>
             </a:r>
             <a:endParaRPr lang="en-US" sz="3400" dirty="0"/>
           </a:p>
@@ -3271,7 +3269,7 @@
               <a:buNone/>
             </a:pPr>
             <a:r>
-              <a:rPr lang="en-US" sz="1250" b="1" dirty="0">
+              <a:rPr lang="en-US" sz="2400" b="1" dirty="0">
                 <a:solidFill>
                   <a:srgbClr val="0B5A72"/>
                 </a:solidFill>
@@ -3281,7 +3279,7 @@
               </a:rPr>
               <a:t>농지 경계</a:t>
             </a:r>
-            <a:endParaRPr lang="en-US" sz="1250" dirty="0"/>
+            <a:endParaRPr lang="en-US" sz="2400" dirty="0"/>
           </a:p>
         </p:txBody>
       </p:sp>
@@ -3334,7 +3332,7 @@
               <a:buNone/>
             </a:pPr>
             <a:r>
-              <a:rPr lang="en-US" sz="1250" b="1" dirty="0">
+              <a:rPr lang="en-US" sz="2400" b="1" dirty="0">
                 <a:solidFill>
                   <a:srgbClr val="0B5A72"/>
                 </a:solidFill>
@@ -3344,7 +3342,7 @@
               </a:rPr>
               <a:t>판정과 상태</a:t>
             </a:r>
-            <a:endParaRPr lang="en-US" sz="1250" dirty="0"/>
+            <a:endParaRPr lang="en-US" sz="2400" dirty="0"/>
           </a:p>
         </p:txBody>
       </p:sp>
@@ -3397,7 +3395,7 @@
               <a:buNone/>
             </a:pPr>
             <a:r>
-              <a:rPr lang="en-US" sz="1250" b="1" dirty="0">
+              <a:rPr lang="en-US" sz="2400" b="1" dirty="0">
                 <a:solidFill>
                   <a:srgbClr val="0B5A72"/>
                 </a:solidFill>
@@ -3407,7 +3405,7 @@
               </a:rPr>
               <a:t>기준 대조</a:t>
             </a:r>
-            <a:endParaRPr lang="en-US" sz="1250" dirty="0"/>
+            <a:endParaRPr lang="en-US" sz="2400" dirty="0"/>
           </a:p>
         </p:txBody>
       </p:sp>
@@ -3460,7 +3458,7 @@
               <a:buNone/>
             </a:pPr>
             <a:r>
-              <a:rPr lang="en-US" sz="1250" b="1" dirty="0">
+              <a:rPr lang="en-US" sz="2400" b="1" dirty="0">
                 <a:solidFill>
                   <a:srgbClr val="0B5A72"/>
                 </a:solidFill>
@@ -3470,7 +3468,7 @@
               </a:rPr>
               <a:t>출처 추적</a:t>
             </a:r>
-            <a:endParaRPr lang="en-US" sz="1250" dirty="0"/>
+            <a:endParaRPr lang="en-US" sz="2400" dirty="0"/>
           </a:p>
         </p:txBody>
       </p:sp>
@@ -3523,7 +3521,7 @@
               <a:buNone/>
             </a:pPr>
             <a:r>
-              <a:rPr lang="en-US" sz="1250" b="1" dirty="0">
+              <a:rPr lang="en-US" sz="2400" b="1" dirty="0">
                 <a:solidFill>
                   <a:srgbClr val="0B5A72"/>
                 </a:solidFill>
@@ -3533,7 +3531,7 @@
               </a:rPr>
               <a:t>쉬운 말</a:t>
             </a:r>
-            <a:endParaRPr lang="en-US" sz="1250" dirty="0"/>
+            <a:endParaRPr lang="en-US" sz="2400" dirty="0"/>
           </a:p>
         </p:txBody>
       </p:sp>
@@ -3726,8 +3724,8 @@
         </p:blipFill>
         <p:spPr>
           <a:xfrm>
-            <a:off x="566928" y="2378834"/>
-            <a:ext cx="4590288" cy="3581660"/>
+            <a:off x="731865" y="2330067"/>
+            <a:ext cx="5419432" cy="4228615"/>
           </a:xfrm>
           <a:prstGeom prst="rect">
             <a:avLst/>
@@ -3742,8 +3740,8 @@
         </p:nvSpPr>
         <p:spPr>
           <a:xfrm>
-            <a:off x="5340096" y="1920240"/>
-            <a:ext cx="6291072" cy="274320"/>
+            <a:off x="7034786" y="1920240"/>
+            <a:ext cx="4596382" cy="274320"/>
           </a:xfrm>
           <a:prstGeom prst="rect">
             <a:avLst/>
@@ -3781,8 +3779,8 @@
         </p:nvSpPr>
         <p:spPr>
           <a:xfrm>
-            <a:off x="5340096" y="2340864"/>
-            <a:ext cx="6291072" cy="749808"/>
+            <a:off x="7034786" y="2340864"/>
+            <a:ext cx="4596382" cy="749808"/>
           </a:xfrm>
           <a:prstGeom prst="roundRect">
             <a:avLst>
@@ -3815,7 +3813,7 @@
         </p:nvSpPr>
         <p:spPr>
           <a:xfrm>
-            <a:off x="5596128" y="2340864"/>
+            <a:off x="7260465" y="2340864"/>
             <a:ext cx="402336" cy="749808"/>
           </a:xfrm>
           <a:prstGeom prst="rect">
@@ -3854,8 +3852,8 @@
         </p:nvSpPr>
         <p:spPr>
           <a:xfrm>
-            <a:off x="6126480" y="2340864"/>
-            <a:ext cx="3749040" cy="749808"/>
+            <a:off x="7617806" y="2340864"/>
+            <a:ext cx="2257713" cy="749808"/>
           </a:xfrm>
           <a:prstGeom prst="rect">
             <a:avLst/>
@@ -3966,8 +3964,8 @@
         </p:nvSpPr>
         <p:spPr>
           <a:xfrm>
-            <a:off x="5340096" y="3209544"/>
-            <a:ext cx="6291072" cy="749808"/>
+            <a:off x="7034786" y="3209544"/>
+            <a:ext cx="4596382" cy="749808"/>
           </a:xfrm>
           <a:prstGeom prst="roundRect">
             <a:avLst>
@@ -4000,7 +3998,7 @@
         </p:nvSpPr>
         <p:spPr>
           <a:xfrm>
-            <a:off x="5596128" y="3209544"/>
+            <a:off x="7260465" y="3209544"/>
             <a:ext cx="402336" cy="749808"/>
           </a:xfrm>
           <a:prstGeom prst="rect">
@@ -4039,8 +4037,8 @@
         </p:nvSpPr>
         <p:spPr>
           <a:xfrm>
-            <a:off x="6126480" y="3209544"/>
-            <a:ext cx="3749040" cy="749808"/>
+            <a:off x="7617806" y="3209544"/>
+            <a:ext cx="2257713" cy="749808"/>
           </a:xfrm>
           <a:prstGeom prst="rect">
             <a:avLst/>
@@ -4151,8 +4149,8 @@
         </p:nvSpPr>
         <p:spPr>
           <a:xfrm>
-            <a:off x="5340096" y="4078224"/>
-            <a:ext cx="6291072" cy="749808"/>
+            <a:off x="7034786" y="4078224"/>
+            <a:ext cx="4596382" cy="749808"/>
           </a:xfrm>
           <a:prstGeom prst="roundRect">
             <a:avLst>
@@ -4185,7 +4183,7 @@
         </p:nvSpPr>
         <p:spPr>
           <a:xfrm>
-            <a:off x="5596128" y="4078224"/>
+            <a:off x="7260465" y="4078224"/>
             <a:ext cx="402336" cy="749808"/>
           </a:xfrm>
           <a:prstGeom prst="rect">
@@ -4224,8 +4222,8 @@
         </p:nvSpPr>
         <p:spPr>
           <a:xfrm>
-            <a:off x="6126480" y="4078224"/>
-            <a:ext cx="3749040" cy="749808"/>
+            <a:off x="7617806" y="4078224"/>
+            <a:ext cx="2257713" cy="749808"/>
           </a:xfrm>
           <a:prstGeom prst="rect">
             <a:avLst/>
@@ -4336,8 +4334,8 @@
         </p:nvSpPr>
         <p:spPr>
           <a:xfrm>
-            <a:off x="5340096" y="4946904"/>
-            <a:ext cx="6291072" cy="749808"/>
+            <a:off x="7034786" y="4946904"/>
+            <a:ext cx="4596382" cy="749808"/>
           </a:xfrm>
           <a:prstGeom prst="roundRect">
             <a:avLst>
@@ -4370,7 +4368,7 @@
         </p:nvSpPr>
         <p:spPr>
           <a:xfrm>
-            <a:off x="5596128" y="4946904"/>
+            <a:off x="7260465" y="4946904"/>
             <a:ext cx="402336" cy="749808"/>
           </a:xfrm>
           <a:prstGeom prst="rect">
@@ -4409,8 +4407,8 @@
         </p:nvSpPr>
         <p:spPr>
           <a:xfrm>
-            <a:off x="6126480" y="4946904"/>
-            <a:ext cx="3749040" cy="749808"/>
+            <a:off x="7617806" y="4946904"/>
+            <a:ext cx="2257713" cy="749808"/>
           </a:xfrm>
           <a:prstGeom prst="rect">
             <a:avLst/>
@@ -4521,8 +4519,8 @@
         </p:nvSpPr>
         <p:spPr>
           <a:xfrm>
-            <a:off x="5340096" y="5815584"/>
-            <a:ext cx="6291072" cy="749808"/>
+            <a:off x="7034786" y="5815584"/>
+            <a:ext cx="4596382" cy="749808"/>
           </a:xfrm>
           <a:prstGeom prst="roundRect">
             <a:avLst>
@@ -4555,7 +4553,7 @@
         </p:nvSpPr>
         <p:spPr>
           <a:xfrm>
-            <a:off x="5596128" y="5815584"/>
+            <a:off x="7260465" y="5815584"/>
             <a:ext cx="402336" cy="749808"/>
           </a:xfrm>
           <a:prstGeom prst="rect">
@@ -4594,8 +4592,8 @@
         </p:nvSpPr>
         <p:spPr>
           <a:xfrm>
-            <a:off x="6126480" y="5815584"/>
-            <a:ext cx="3749040" cy="749808"/>
+            <a:off x="7617806" y="5815584"/>
+            <a:ext cx="2257713" cy="749808"/>
           </a:xfrm>
           <a:prstGeom prst="rect">
             <a:avLst/>
@@ -5747,7 +5745,7 @@
               <a:buNone/>
             </a:pPr>
             <a:r>
-              <a:rPr lang="en-US" sz="1700" b="1" dirty="0">
+              <a:rPr lang="en-US" sz="2800" b="1" dirty="0">
                 <a:solidFill>
                   <a:srgbClr val="14181A"/>
                 </a:solidFill>
@@ -5757,7 +5755,7 @@
               </a:rPr>
               <a:t>농지를 계약하기 전</a:t>
             </a:r>
-            <a:endParaRPr lang="en-US" sz="1700" dirty="0"/>
+            <a:endParaRPr lang="en-US" sz="2800" dirty="0"/>
           </a:p>
         </p:txBody>
       </p:sp>
@@ -5825,7 +5823,7 @@
               <a:buNone/>
             </a:pPr>
             <a:r>
-              <a:rPr lang="en-US" sz="1700" b="1" dirty="0">
+              <a:rPr lang="en-US" sz="2800" b="1" dirty="0">
                 <a:solidFill>
                   <a:srgbClr val="14181A"/>
                 </a:solidFill>
@@ -5835,7 +5833,7 @@
               </a:rPr>
               <a:t>심을 작물을 바꿀 때</a:t>
             </a:r>
-            <a:endParaRPr lang="en-US" sz="1700" dirty="0"/>
+            <a:endParaRPr lang="en-US" sz="2800" dirty="0"/>
           </a:p>
         </p:txBody>
       </p:sp>
@@ -5903,7 +5901,7 @@
               <a:buNone/>
             </a:pPr>
             <a:r>
-              <a:rPr lang="en-US" sz="1700" b="1" dirty="0">
+              <a:rPr lang="en-US" sz="2800" b="1" dirty="0">
                 <a:solidFill>
                   <a:srgbClr val="14181A"/>
                 </a:solidFill>
@@ -5913,7 +5911,7 @@
               </a:rPr>
               <a:t>파종 전 가까운 기간</a:t>
             </a:r>
-            <a:endParaRPr lang="en-US" sz="1700" dirty="0"/>
+            <a:endParaRPr lang="en-US" sz="2800" dirty="0"/>
           </a:p>
         </p:txBody>
       </p:sp>
@@ -5969,14 +5967,15 @@
         </p:nvPicPr>
         <p:blipFill>
           <a:blip r:embed="rId3"/>
+          <a:srcRect r="50801"/>
           <a:stretch>
             <a:fillRect/>
           </a:stretch>
         </p:blipFill>
         <p:spPr>
           <a:xfrm>
-            <a:off x="5175504" y="2507017"/>
-            <a:ext cx="6135624" cy="938710"/>
+            <a:off x="5175503" y="2507017"/>
+            <a:ext cx="5842659" cy="1816890"/>
           </a:xfrm>
           <a:prstGeom prst="rect">
             <a:avLst/>
@@ -6076,7 +6075,7 @@
               <a:buNone/>
             </a:pPr>
             <a:r>
-              <a:rPr lang="en-US" sz="1150" b="1" dirty="0">
+              <a:rPr lang="ko-KR" altLang="en-US" sz="1150" b="1" dirty="0">
                 <a:solidFill>
                   <a:srgbClr val="8A5806"/>
                 </a:solidFill>
@@ -6084,7 +6083,7 @@
                 <a:ea typeface="맑은 고딕" pitchFamily="34" charset="-122"/>
                 <a:cs typeface="맑은 고딕" pitchFamily="34" charset="-120"/>
               </a:rPr>
-              <a:t>실증 제안</a:t>
+              <a:t>다음 검증</a:t>
             </a:r>
             <a:endParaRPr lang="en-US" sz="1150" dirty="0"/>
           </a:p>
@@ -6111,14 +6110,13 @@
           <a:bodyPr wrap="square" lIns="0" tIns="0" rIns="0" bIns="0" rtlCol="0" anchor="t"/>
           <a:lstStyle/>
           <a:p>
-            <a:pPr marL="0" indent="0">
+            <a:pPr>
               <a:lnSpc>
                 <a:spcPct val="130000"/>
               </a:lnSpc>
-              <a:buNone/>
-            </a:pPr>
-            <a:r>
-              <a:rPr lang="en-US" sz="1250" dirty="0">
+            </a:pPr>
+            <a:r>
+              <a:rPr lang="ko-KR" altLang="en-US" sz="1250" dirty="0">
                 <a:solidFill>
                   <a:srgbClr val="14181A"/>
                 </a:solidFill>
@@ -6126,7 +6124,84 @@
                 <a:ea typeface="맑은 고딕" pitchFamily="34" charset="-122"/>
                 <a:cs typeface="맑은 고딕" pitchFamily="34" charset="-120"/>
               </a:rPr>
-              <a:t>귀농귀촌센터·농업기술센터·농협 상담 창구를 첫 실증 파트너로 제안하고, 반복 사용이 확인되면 기관용 연간 라이선스를 검토하겠습니다.</a:t>
+              <a:t>지역을 넓힐 때 행정구역별로 자료를 따로 만들어 두지 않습니다</a:t>
+            </a:r>
+            <a:r>
+              <a:rPr lang="en-US" altLang="ko-KR" sz="1250" dirty="0">
+                <a:solidFill>
+                  <a:srgbClr val="14181A"/>
+                </a:solidFill>
+                <a:latin typeface="맑은 고딕" pitchFamily="34" charset="0"/>
+                <a:ea typeface="맑은 고딕" pitchFamily="34" charset="-122"/>
+                <a:cs typeface="맑은 고딕" pitchFamily="34" charset="-120"/>
+              </a:rPr>
+              <a:t>. </a:t>
+            </a:r>
+            <a:r>
+              <a:rPr lang="ko-KR" altLang="en-US" sz="1250" dirty="0">
+                <a:solidFill>
+                  <a:srgbClr val="14181A"/>
+                </a:solidFill>
+                <a:latin typeface="맑은 고딕" pitchFamily="34" charset="0"/>
+                <a:ea typeface="맑은 고딕" pitchFamily="34" charset="-122"/>
+                <a:cs typeface="맑은 고딕" pitchFamily="34" charset="-120"/>
+              </a:rPr>
+              <a:t>확인한 농지 단위로 그때 조회합니다</a:t>
+            </a:r>
+            <a:r>
+              <a:rPr lang="en-US" altLang="ko-KR" sz="1250" dirty="0">
+                <a:solidFill>
+                  <a:srgbClr val="14181A"/>
+                </a:solidFill>
+                <a:latin typeface="맑은 고딕" pitchFamily="34" charset="0"/>
+                <a:ea typeface="맑은 고딕" pitchFamily="34" charset="-122"/>
+                <a:cs typeface="맑은 고딕" pitchFamily="34" charset="-120"/>
+              </a:rPr>
+              <a:t>. </a:t>
+            </a:r>
+            <a:r>
+              <a:rPr lang="ko-KR" altLang="en-US" sz="1250" dirty="0">
+                <a:solidFill>
+                  <a:srgbClr val="14181A"/>
+                </a:solidFill>
+                <a:latin typeface="맑은 고딕" pitchFamily="34" charset="0"/>
+                <a:ea typeface="맑은 고딕" pitchFamily="34" charset="-122"/>
+                <a:cs typeface="맑은 고딕" pitchFamily="34" charset="-120"/>
+              </a:rPr>
+              <a:t>상담 창구에서 실제 계약 전 판단에 써 보고</a:t>
+            </a:r>
+            <a:r>
+              <a:rPr lang="en-US" altLang="ko-KR" sz="1250" dirty="0">
+                <a:solidFill>
+                  <a:srgbClr val="14181A"/>
+                </a:solidFill>
+                <a:latin typeface="맑은 고딕" pitchFamily="34" charset="0"/>
+                <a:ea typeface="맑은 고딕" pitchFamily="34" charset="-122"/>
+                <a:cs typeface="맑은 고딕" pitchFamily="34" charset="-120"/>
+              </a:rPr>
+              <a:t>, </a:t>
+            </a:r>
+            <a:r>
+              <a:rPr lang="ko-KR" altLang="en-US" sz="1250" dirty="0">
+                <a:solidFill>
+                  <a:srgbClr val="14181A"/>
+                </a:solidFill>
+                <a:latin typeface="맑은 고딕" pitchFamily="34" charset="0"/>
+                <a:ea typeface="맑은 고딕" pitchFamily="34" charset="-122"/>
+                <a:cs typeface="맑은 고딕" pitchFamily="34" charset="-120"/>
+              </a:rPr>
+              <a:t>판정이 현장과 맞았는지 확인하려 합니다</a:t>
+            </a:r>
+            <a:r>
+              <a:rPr lang="en-US" altLang="ko-KR" sz="1250" dirty="0">
+                <a:solidFill>
+                  <a:srgbClr val="14181A"/>
+                </a:solidFill>
+                <a:latin typeface="맑은 고딕" pitchFamily="34" charset="0"/>
+                <a:ea typeface="맑은 고딕" pitchFamily="34" charset="-122"/>
+                <a:cs typeface="맑은 고딕" pitchFamily="34" charset="-120"/>
+              </a:rPr>
+              <a:t>.</a:t>
             </a:r>
             <a:endParaRPr lang="en-US" sz="1250" dirty="0"/>
           </a:p>

--- a/발표/20260805_밭보다_본선발표_v8.pptx
+++ b/발표/20260805_밭보다_본선발표_v8.pptx
@@ -5675,7 +5675,51 @@
                 <a:ea typeface="맑은 고딕" pitchFamily="34" charset="-122"/>
                 <a:cs typeface="맑은 고딕" pitchFamily="34" charset="-120"/>
               </a:rPr>
-              <a:t>반복 사용은 매일이 아니라, 판단이 필요한 사건마다입니다</a:t>
+              <a:t>반복 사용은 매일이 아니라, 판단이 </a:t>
+            </a:r>
+            <a:r>
+              <a:rPr lang="en-US" sz="2800" b="1" dirty="0" err="1">
+                <a:solidFill>
+                  <a:srgbClr val="14181A"/>
+                </a:solidFill>
+                <a:latin typeface="맑은 고딕" pitchFamily="34" charset="0"/>
+                <a:ea typeface="맑은 고딕" pitchFamily="34" charset="-122"/>
+                <a:cs typeface="맑은 고딕" pitchFamily="34" charset="-120"/>
+              </a:rPr>
+              <a:t>필요한</a:t>
+            </a:r>
+            <a:r>
+              <a:rPr lang="en-US" sz="2800" b="1" dirty="0">
+                <a:solidFill>
+                  <a:srgbClr val="14181A"/>
+                </a:solidFill>
+                <a:latin typeface="맑은 고딕" pitchFamily="34" charset="0"/>
+                <a:ea typeface="맑은 고딕" pitchFamily="34" charset="-122"/>
+                <a:cs typeface="맑은 고딕" pitchFamily="34" charset="-120"/>
+              </a:rPr>
+              <a:t> </a:t>
+            </a:r>
+            <a:r>
+              <a:rPr lang="ko-KR" altLang="en-US" sz="2800" b="1" dirty="0">
+                <a:solidFill>
+                  <a:srgbClr val="14181A"/>
+                </a:solidFill>
+                <a:latin typeface="맑은 고딕" pitchFamily="34" charset="0"/>
+                <a:ea typeface="맑은 고딕" pitchFamily="34" charset="-122"/>
+                <a:cs typeface="맑은 고딕" pitchFamily="34" charset="-120"/>
+              </a:rPr>
+              <a:t>세 순간</a:t>
+            </a:r>
+            <a:r>
+              <a:rPr lang="en-US" sz="2800" b="1" dirty="0" err="1">
+                <a:solidFill>
+                  <a:srgbClr val="14181A"/>
+                </a:solidFill>
+                <a:latin typeface="맑은 고딕" pitchFamily="34" charset="0"/>
+                <a:ea typeface="맑은 고딕" pitchFamily="34" charset="-122"/>
+                <a:cs typeface="맑은 고딕" pitchFamily="34" charset="-120"/>
+              </a:rPr>
+              <a:t>마다입니다</a:t>
             </a:r>
             <a:endParaRPr lang="en-US" sz="2800" dirty="0"/>
           </a:p>
@@ -5951,7 +5995,37 @@
                 <a:ea typeface="맑은 고딕" pitchFamily="34" charset="-122"/>
                 <a:cs typeface="맑은 고딕" pitchFamily="34" charset="-120"/>
               </a:rPr>
-              <a:t>농지는 즐겨찾기로 담아 두고, 브라우저에만 저장합니다. 서버로 보내지 않습니다.</a:t>
+              <a:t>농지는 즐겨찾기로 담아 두고, 브라우저에만 저장합니다. </a:t>
+            </a:r>
+          </a:p>
+          <a:p>
+            <a:pPr marL="0" indent="0">
+              <a:lnSpc>
+                <a:spcPct val="130000"/>
+              </a:lnSpc>
+              <a:buNone/>
+            </a:pPr>
+            <a:r>
+              <a:rPr lang="en-US" sz="1250" dirty="0" err="1">
+                <a:solidFill>
+                  <a:srgbClr val="55636A"/>
+                </a:solidFill>
+                <a:latin typeface="맑은 고딕" pitchFamily="34" charset="0"/>
+                <a:ea typeface="맑은 고딕" pitchFamily="34" charset="-122"/>
+                <a:cs typeface="맑은 고딕" pitchFamily="34" charset="-120"/>
+              </a:rPr>
+              <a:t>서버로</a:t>
+            </a:r>
+            <a:r>
+              <a:rPr lang="en-US" sz="1250" dirty="0">
+                <a:solidFill>
+                  <a:srgbClr val="55636A"/>
+                </a:solidFill>
+                <a:latin typeface="맑은 고딕" pitchFamily="34" charset="0"/>
+                <a:ea typeface="맑은 고딕" pitchFamily="34" charset="-122"/>
+                <a:cs typeface="맑은 고딕" pitchFamily="34" charset="-120"/>
+              </a:rPr>
+              <a:t> 보내지 않습니다.</a:t>
             </a:r>
             <a:endParaRPr lang="en-US" sz="1250" dirty="0"/>
           </a:p>
@@ -6137,6 +6211,13 @@
               </a:rPr>
               <a:t>. </a:t>
             </a:r>
+          </a:p>
+          <a:p>
+            <a:pPr>
+              <a:lnSpc>
+                <a:spcPct val="130000"/>
+              </a:lnSpc>
+            </a:pPr>
             <a:r>
               <a:rPr lang="ko-KR" altLang="en-US" sz="1250" dirty="0">
                 <a:solidFill>
@@ -6168,7 +6249,33 @@
                 <a:ea typeface="맑은 고딕" pitchFamily="34" charset="-122"/>
                 <a:cs typeface="맑은 고딕" pitchFamily="34" charset="-120"/>
               </a:rPr>
-              <a:t>상담 창구에서 실제 계약 전 판단에 써 보고</a:t>
+              <a:t>판정을 받은 농지를 골라 흙과 배수를 </a:t>
+            </a:r>
+            <a:endParaRPr lang="en-US" altLang="ko-KR" sz="1250" dirty="0">
+              <a:solidFill>
+                <a:srgbClr val="14181A"/>
+              </a:solidFill>
+              <a:latin typeface="맑은 고딕" pitchFamily="34" charset="0"/>
+              <a:ea typeface="맑은 고딕" pitchFamily="34" charset="-122"/>
+              <a:cs typeface="맑은 고딕" pitchFamily="34" charset="-120"/>
+            </a:endParaRPr>
+          </a:p>
+          <a:p>
+            <a:pPr>
+              <a:lnSpc>
+                <a:spcPct val="130000"/>
+              </a:lnSpc>
+            </a:pPr>
+            <a:r>
+              <a:rPr lang="ko-KR" altLang="en-US" sz="1250" dirty="0">
+                <a:solidFill>
+                  <a:srgbClr val="14181A"/>
+                </a:solidFill>
+                <a:latin typeface="맑은 고딕" pitchFamily="34" charset="0"/>
+                <a:ea typeface="맑은 고딕" pitchFamily="34" charset="-122"/>
+                <a:cs typeface="맑은 고딕" pitchFamily="34" charset="-120"/>
+              </a:rPr>
+              <a:t>현장에서 직접 확인하면</a:t>
             </a:r>
             <a:r>
               <a:rPr lang="en-US" altLang="ko-KR" sz="1250" dirty="0">
@@ -6190,7 +6297,7 @@
                 <a:ea typeface="맑은 고딕" pitchFamily="34" charset="-122"/>
                 <a:cs typeface="맑은 고딕" pitchFamily="34" charset="-120"/>
               </a:rPr>
-              <a:t>판정이 현장과 맞았는지 확인하려 합니다</a:t>
+              <a:t>저희 판정과 대조할 수 있습니다</a:t>
             </a:r>
             <a:r>
               <a:rPr lang="en-US" altLang="ko-KR" sz="1250" dirty="0">
@@ -6986,7 +7093,7 @@
         </p:nvSpPr>
         <p:spPr>
           <a:xfrm>
-            <a:off x="566928" y="1737360"/>
+            <a:off x="566928" y="1182287"/>
             <a:ext cx="6309360" cy="1737360"/>
           </a:xfrm>
           <a:prstGeom prst="rect">
@@ -7006,7 +7113,7 @@
               <a:buNone/>
             </a:pPr>
             <a:r>
-              <a:rPr lang="en-US" sz="3100" b="1" dirty="0">
+              <a:rPr lang="ko-KR" altLang="en-US" sz="3100" b="1" dirty="0">
                 <a:solidFill>
                   <a:srgbClr val="FFFFFF"/>
                 </a:solidFill>
@@ -7014,9 +7121,8 @@
                 <a:ea typeface="맑은 고딕" pitchFamily="34" charset="-122"/>
                 <a:cs typeface="맑은 고딕" pitchFamily="34" charset="-120"/>
               </a:rPr>
-              <a:t>농지 경계부터 근거의 출처까지,</a:t>
-            </a:r>
-            <a:endParaRPr lang="en-US" sz="3100" dirty="0"/>
+              <a:t>내 땅의 가능성을 필지 단위로</a:t>
+            </a:r>
           </a:p>
           <a:p>
             <a:pPr marL="0" indent="0">
@@ -7026,7 +7132,7 @@
               <a:buNone/>
             </a:pPr>
             <a:r>
-              <a:rPr lang="en-US" sz="3100" b="1" dirty="0">
+              <a:rPr lang="ko-KR" altLang="en-US" sz="3100" b="1" dirty="0">
                 <a:solidFill>
                   <a:srgbClr val="FFFFFF"/>
                 </a:solidFill>
@@ -7034,9 +7140,64 @@
                 <a:ea typeface="맑은 고딕" pitchFamily="34" charset="-122"/>
                 <a:cs typeface="맑은 고딕" pitchFamily="34" charset="-120"/>
               </a:rPr>
-              <a:t>내 땅 단위 참고 판정입니다</a:t>
-            </a:r>
-            <a:endParaRPr lang="en-US" sz="3100" dirty="0"/>
+              <a:t>투명하게 들여다보는 서비스입니다</a:t>
+            </a:r>
+            <a:endParaRPr lang="en-US" altLang="ko-KR" sz="3100" b="1" dirty="0">
+              <a:solidFill>
+                <a:srgbClr val="FFFFFF"/>
+              </a:solidFill>
+              <a:latin typeface="맑은 고딕" pitchFamily="34" charset="0"/>
+              <a:ea typeface="맑은 고딕" pitchFamily="34" charset="-122"/>
+              <a:cs typeface="맑은 고딕" pitchFamily="34" charset="-120"/>
+            </a:endParaRPr>
+          </a:p>
+          <a:p>
+            <a:pPr>
+              <a:lnSpc>
+                <a:spcPct val="116000"/>
+              </a:lnSpc>
+            </a:pPr>
+            <a:r>
+              <a:rPr lang="ko-KR" altLang="en-US" sz="2000" b="1" dirty="0">
+                <a:solidFill>
+                  <a:srgbClr val="FFFFFF"/>
+                </a:solidFill>
+                <a:latin typeface="맑은 고딕" pitchFamily="34" charset="0"/>
+                <a:ea typeface="맑은 고딕" pitchFamily="34" charset="-122"/>
+                <a:cs typeface="맑은 고딕" pitchFamily="34" charset="-120"/>
+              </a:rPr>
+              <a:t>농지 경계부터 근거의 출처까지</a:t>
+            </a:r>
+            <a:r>
+              <a:rPr lang="en-US" altLang="ko-KR" sz="2000" b="1" dirty="0">
+                <a:solidFill>
+                  <a:srgbClr val="FFFFFF"/>
+                </a:solidFill>
+                <a:latin typeface="맑은 고딕" pitchFamily="34" charset="0"/>
+                <a:ea typeface="맑은 고딕" pitchFamily="34" charset="-122"/>
+                <a:cs typeface="맑은 고딕" pitchFamily="34" charset="-120"/>
+              </a:rPr>
+              <a:t>, </a:t>
+            </a:r>
+          </a:p>
+          <a:p>
+            <a:pPr>
+              <a:lnSpc>
+                <a:spcPct val="116000"/>
+              </a:lnSpc>
+            </a:pPr>
+            <a:r>
+              <a:rPr lang="ko-KR" altLang="en-US" sz="2000" b="1" dirty="0">
+                <a:solidFill>
+                  <a:srgbClr val="FFFFFF"/>
+                </a:solidFill>
+                <a:latin typeface="맑은 고딕" pitchFamily="34" charset="0"/>
+                <a:ea typeface="맑은 고딕" pitchFamily="34" charset="-122"/>
+                <a:cs typeface="맑은 고딕" pitchFamily="34" charset="-120"/>
+              </a:rPr>
+              <a:t>수치와 출처와 기준시각을 눈으로 확인하게 만듭니다</a:t>
+            </a:r>
+            <a:endParaRPr lang="en-US" sz="2000" dirty="0"/>
           </a:p>
         </p:txBody>
       </p:sp>
